--- a/courses/learn_partitioning/module03-05-hypergraph-partition/slides.pptx
+++ b/courses/learn_partitioning/module03-05-hypergraph-partition/slides.pptx
@@ -16,6 +16,9 @@
     <p:sldId id="264" r:id="rId16"/>
     <p:sldId id="265" r:id="rId17"/>
     <p:sldId id="266" r:id="rId18"/>
+    <p:sldId id="267" r:id="rId19"/>
+    <p:sldId id="268" r:id="rId20"/>
+    <p:sldId id="269" r:id="rId21"/>
   </p:sldIdLst>
   <p:sldSz cx="12191695" cy="6858000" type="screen4x3"/>
   <p:notesSz cx="6858000" cy="9144000"/>
@@ -582,7 +585,7 @@
           <a:lstStyle/>
           <a:p>
             <a:r>
-              <a:t>Common traps: optimizing cut while ignoring balance; reporting pairwise cut when the instance is a hypergraph; flipping locked terminals; and stopping before rollback to the best KL or FM prefix. For multilevel flows, verify coarsening before you blame the refiner.</a:t>
+              <a:t>In the browser lab track, open the **hypergraph-partition** lab from the tools shelf. Load the starter graph, run the algorithm once, and read cutsize and balance in the metrics panel. Work the challenges that lock the goldens, then come back to implement the same loop yourself.</a:t>
             </a:r>
           </a:p>
         </p:txBody>
@@ -652,6 +655,146 @@
           <a:lstStyle/>
           <a:p>
             <a:r>
+              <a:t>In the implement track, open this module's EXAMPLES.md Pseudocode section and the course common solvers. Parse the tiny graph, run the algorithm with a deterministic seed, and print the assignment plus cutsize and balance. Match the browser goldens before you claim the checklist.</a:t>
+            </a:r>
+          </a:p>
+        </p:txBody>
+      </p:sp>
+      <p:sp>
+        <p:nvSpPr>
+          <p:cNvPr id="4" name="Slide Number Placeholder 3"/>
+          <p:cNvSpPr>
+            <a:spLocks noGrp="1"/>
+          </p:cNvSpPr>
+          <p:nvPr>
+            <p:ph type="sldNum" idx="5" sz="quarter"/>
+          </p:nvPr>
+        </p:nvSpPr>
+        <p:spPr/>
+      </p:sp>
+    </p:spTree>
+  </p:cSld>
+  <p:clrMapOvr>
+    <a:masterClrMapping/>
+  </p:clrMapOvr>
+</p:notes>
+</file>
+
+<file path=ppt/notesSlides/notesSlide12.xml><?xml version="1.0" encoding="utf-8"?>
+<p:notes xmlns:a="http://schemas.openxmlformats.org/drawingml/2006/main" xmlns:p="http://schemas.openxmlformats.org/presentationml/2006/main" xmlns:r="http://schemas.openxmlformats.org/officeDocument/2006/relationships">
+  <p:cSld>
+    <p:spTree>
+      <p:nvGrpSpPr>
+        <p:cNvPr id="1" name=""/>
+        <p:cNvGrpSpPr/>
+        <p:nvPr/>
+      </p:nvGrpSpPr>
+      <p:grpSpPr>
+        <a:xfrm>
+          <a:off x="0" y="0"/>
+          <a:ext cx="0" cy="0"/>
+          <a:chOff x="0" y="0"/>
+          <a:chExt cx="0" cy="0"/>
+        </a:xfrm>
+      </p:grpSpPr>
+      <p:sp>
+        <p:nvSpPr>
+          <p:cNvPr id="2" name="Slide Image Placeholder 1"/>
+          <p:cNvSpPr>
+            <a:spLocks noGrp="1"/>
+          </p:cNvSpPr>
+          <p:nvPr>
+            <p:ph type="sldImg" idx="2"/>
+          </p:nvPr>
+        </p:nvSpPr>
+        <p:spPr/>
+      </p:sp>
+      <p:sp>
+        <p:nvSpPr>
+          <p:cNvPr id="3" name="Notes Placeholder 2"/>
+          <p:cNvSpPr>
+            <a:spLocks noGrp="1"/>
+          </p:cNvSpPr>
+          <p:nvPr>
+            <p:ph type="body" idx="3" sz="quarter"/>
+          </p:nvPr>
+        </p:nvSpPr>
+        <p:spPr/>
+        <p:txBody>
+          <a:bodyPr/>
+          <a:lstStyle/>
+          <a:p>
+            <a:r>
+              <a:t>Common traps: optimizing cut while ignoring balance; reporting pairwise cut when the instance is a hypergraph; flipping locked terminals; and stopping before rollback to the best KL or FM prefix. For multilevel flows, verify coarsening before you blame the refiner.</a:t>
+            </a:r>
+          </a:p>
+        </p:txBody>
+      </p:sp>
+      <p:sp>
+        <p:nvSpPr>
+          <p:cNvPr id="4" name="Slide Number Placeholder 3"/>
+          <p:cNvSpPr>
+            <a:spLocks noGrp="1"/>
+          </p:cNvSpPr>
+          <p:nvPr>
+            <p:ph type="sldNum" idx="5" sz="quarter"/>
+          </p:nvPr>
+        </p:nvSpPr>
+        <p:spPr/>
+      </p:sp>
+    </p:spTree>
+  </p:cSld>
+  <p:clrMapOvr>
+    <a:masterClrMapping/>
+  </p:clrMapOvr>
+</p:notes>
+</file>
+
+<file path=ppt/notesSlides/notesSlide13.xml><?xml version="1.0" encoding="utf-8"?>
+<p:notes xmlns:a="http://schemas.openxmlformats.org/drawingml/2006/main" xmlns:p="http://schemas.openxmlformats.org/presentationml/2006/main" xmlns:r="http://schemas.openxmlformats.org/officeDocument/2006/relationships">
+  <p:cSld>
+    <p:spTree>
+      <p:nvGrpSpPr>
+        <p:cNvPr id="1" name=""/>
+        <p:cNvGrpSpPr/>
+        <p:nvPr/>
+      </p:nvGrpSpPr>
+      <p:grpSpPr>
+        <a:xfrm>
+          <a:off x="0" y="0"/>
+          <a:ext cx="0" cy="0"/>
+          <a:chOff x="0" y="0"/>
+          <a:chExt cx="0" cy="0"/>
+        </a:xfrm>
+      </p:grpSpPr>
+      <p:sp>
+        <p:nvSpPr>
+          <p:cNvPr id="2" name="Slide Image Placeholder 1"/>
+          <p:cNvSpPr>
+            <a:spLocks noGrp="1"/>
+          </p:cNvSpPr>
+          <p:nvPr>
+            <p:ph type="sldImg" idx="2"/>
+          </p:nvPr>
+        </p:nvSpPr>
+        <p:spPr/>
+      </p:sp>
+      <p:sp>
+        <p:nvSpPr>
+          <p:cNvPr id="3" name="Notes Placeholder 2"/>
+          <p:cNvSpPr>
+            <a:spLocks noGrp="1"/>
+          </p:cNvSpPr>
+          <p:nvPr>
+            <p:ph type="body" idx="3" sz="quarter"/>
+          </p:nvPr>
+        </p:nvSpPr>
+        <p:spPr/>
+        <p:txBody>
+          <a:bodyPr/>
+          <a:lstStyle/>
+          <a:p>
+            <a:r>
               <a:t>Complete the checklist for at least one track—preferably both. Implement until your metrics match the starter goldens. When you’re ready, take the short quiz, then continue to the next module.</a:t>
             </a:r>
           </a:p>
@@ -725,12 +868,6 @@
               <a:t>Optimize hyperedge cut, not only pairwise edge cut. Multi-pin nets dominate affinity in real designs. Use clique expansion only for drawing or as a heuristic substrate—not as the reported objective unless the lab says so.</a:t>
             </a:r>
           </a:p>
-          <a:p/>
-          <a:p>
-            <a:r>
-              <a:t>&lt;!-- algorithm-walkthrough --&gt;</a:t>
-            </a:r>
-          </a:p>
         </p:txBody>
       </p:sp>
       <p:sp>
@@ -798,7 +935,13 @@
           <a:lstStyle/>
           <a:p>
             <a:r>
-              <a:t>TINY_HYPERGRAPH has four nets: n1={A,B,C} w=3, n2={D,E}, n3={C,D}, n4={A,B}. Cut counts whole nets spanning ≥2 sides — not pairwise edges alone.</a:t>
+              <a:t>Hypergraph cut counts a net once if it spans more than one part. Pseudocode is a span check per hyperedge—not a sum of clique pairs unless you expand deliberately.</a:t>
+            </a:r>
+          </a:p>
+          <a:p/>
+          <a:p>
+            <a:r>
+              <a:t>Open this module's examples file and find the Pseudocode section. That written sketch is what you implement on the implement track and what the browser challenges measure.</a:t>
             </a:r>
           </a:p>
         </p:txBody>
@@ -868,7 +1011,7 @@
           <a:lstStyle/>
           <a:p>
             <a:r>
-              <a:t>BAD_SEED AE|BCD cuts nets n1(3), n2(2), and n4(1) — hyperedge cut 6. Same seed as graph labs, worse hyper objective.</a:t>
+              <a:t>On the starter hypergraph, golden ABC versus DE leaves a single cut net. Expanding to a clique can tell a different numeric story—report which model you used.</a:t>
             </a:r>
           </a:p>
         </p:txBody>
@@ -938,7 +1081,7 @@
           <a:lstStyle/>
           <a:p>
             <a:r>
-              <a:t>Hypergraph FM clique-expands nets to pair edges, then runs standard FM from the bad seed. Objective reports hyperedge cut on the original nets.</a:t>
+              <a:t>TINY_HYPERGRAPH has four nets: n1={A,B,C} w=3, n2={D,E}, n3={C,D}, n4={A,B}. Cut counts whole nets spanning ≥2 sides — not pairwise edges alone.</a:t>
             </a:r>
           </a:p>
         </p:txBody>
@@ -1008,7 +1151,7 @@
           <a:lstStyle/>
           <a:p>
             <a:r>
-              <a:t>FM reaches ABC|DE. Only bridge net n3={C,D} crosses sides — hyperedge cut 1. n1, n2, n4 stay uncut.</a:t>
+              <a:t>BAD_SEED AE|BCD cuts nets n1(3), n2(2), and n4(1) — hyperedge cut 6. Same seed as graph labs, worse hyper objective.</a:t>
             </a:r>
           </a:p>
         </p:txBody>
@@ -1078,13 +1221,7 @@
           <a:lstStyle/>
           <a:p>
             <a:r>
-              <a:t>Real netlists are hypergraphs. Modeling nets honestly changes the cut objective — clique expansion is for moves, hyper cut is for scoring.</a:t>
-            </a:r>
-          </a:p>
-          <a:p/>
-          <a:p>
-            <a:r>
-              <a:t>&lt;!-- /algorithm-walkthrough --&gt;</a:t>
+              <a:t>Hypergraph FM clique-expands nets to pair edges, then runs standard FM from the bad seed. Objective reports hyperedge cut on the original nets.</a:t>
             </a:r>
           </a:p>
         </p:txBody>
@@ -1154,7 +1291,7 @@
           <a:lstStyle/>
           <a:p>
             <a:r>
-              <a:t>In the browser lab track, open the **hypergraph-partition** lab from the tools shelf. Load the starter graph, run the algorithm once, and read cutsize and balance in the metrics panel. Work the challenges that lock the goldens, then come back to implement the same loop yourself.</a:t>
+              <a:t>FM reaches ABC|DE. Only bridge net n3={C,D} crosses sides — hyperedge cut 1. n1, n2, n4 stay uncut.</a:t>
             </a:r>
           </a:p>
         </p:txBody>
@@ -1224,7 +1361,7 @@
           <a:lstStyle/>
           <a:p>
             <a:r>
-              <a:t>In the implement track, open this module’s examples and the course `common/` solvers. Parse the tiny graph, run the algorithm with a deterministic seed, and print the assignment plus cutsize and balance. Match the browser goldens before you claim the checklist.</a:t>
+              <a:t>Real netlists are hypergraphs. Modeling nets honestly changes the cut objective — clique expansion is for moves, hyper cut is for scoring.</a:t>
             </a:r>
           </a:p>
         </p:txBody>
@@ -4382,21 +4519,45 @@
                 </a:solidFill>
                 <a:latin typeface="Calibri"/>
               </a:rPr>
-              <a:t>Pitfalls</a:t>
-            </a:r>
-          </a:p>
-        </p:txBody>
-      </p:sp>
-      <p:sp>
-        <p:nvSpPr>
-          <p:cNvPr id="3" name="TextBox 2"/>
+              <a:t>Why hypergraphs in partition</a:t>
+            </a:r>
+          </a:p>
+        </p:txBody>
+      </p:sp>
+      <p:pic>
+        <p:nvPicPr>
+          <p:cNvPr id="3" name="Picture 2" descr="05-takeaway.png"/>
+          <p:cNvPicPr>
+            <a:picLocks noChangeAspect="1"/>
+          </p:cNvPicPr>
+          <p:nvPr/>
+        </p:nvPicPr>
+        <p:blipFill>
+          <a:blip r:embed="rId2"/>
+          <a:stretch>
+            <a:fillRect/>
+          </a:stretch>
+        </p:blipFill>
+        <p:spPr>
+          <a:xfrm>
+            <a:off x="548640" y="1143000"/>
+            <a:ext cx="9404113" cy="4572000"/>
+          </a:xfrm>
+          <a:prstGeom prst="rect">
+            <a:avLst/>
+          </a:prstGeom>
+        </p:spPr>
+      </p:pic>
+      <p:sp>
+        <p:nvSpPr>
+          <p:cNvPr id="4" name="TextBox 3"/>
           <p:cNvSpPr txBox="1"/>
           <p:nvPr/>
         </p:nvSpPr>
         <p:spPr>
           <a:xfrm>
-            <a:off x="548640" y="1234440"/>
-            <a:ext cx="11064240" cy="4937760"/>
+            <a:off x="548640" y="5897880"/>
+            <a:ext cx="11064240" cy="411480"/>
           </a:xfrm>
           <a:prstGeom prst="rect">
             <a:avLst/>
@@ -4409,54 +4570,26 @@
           </a:bodyPr>
           <a:lstStyle/>
           <a:p>
-            <a:pPr lvl="0" marL="457200" indent="-228600">
-              <a:buFont typeface="Calibri"/>
-              <a:spcAft>
-                <a:spcPts val="1000"/>
-              </a:spcAft>
-              <a:buSzPct val="100000"/>
-              <a:buChar char="•"/>
+            <a:pPr>
               <a:lnSpc>
                 <a:spcPts val="2200"/>
               </a:lnSpc>
             </a:pPr>
             <a:r>
-              <a:rPr sz="2000" b="0">
+              <a:rPr sz="1200" b="0">
                 <a:solidFill>
                   <a:srgbClr val="333333"/>
                 </a:solidFill>
                 <a:latin typeface="Calibri"/>
               </a:rPr>
-              <a:t>Common traps</a:t>
-            </a:r>
-          </a:p>
-          <a:p>
-            <a:pPr lvl="0" marL="457200" indent="-228600">
-              <a:buFont typeface="Calibri"/>
-              <a:spcAft>
-                <a:spcPts val="1000"/>
-              </a:spcAft>
-              <a:buSzPct val="100000"/>
-              <a:buChar char="•"/>
-              <a:lnSpc>
-                <a:spcPts val="2200"/>
-              </a:lnSpc>
-            </a:pPr>
-            <a:r>
-              <a:rPr sz="2000" b="0">
-                <a:solidFill>
-                  <a:srgbClr val="333333"/>
-                </a:solidFill>
-                <a:latin typeface="Calibri"/>
-              </a:rPr>
-              <a:t>For multilevel flows, verify coarsening before you blame the refiner</a:t>
-            </a:r>
-          </a:p>
-        </p:txBody>
-      </p:sp>
-      <p:sp>
-        <p:nvSpPr>
-          <p:cNvPr id="4" name="TextBox 3"/>
+              <a:t>Why hypergraphs in partition</a:t>
+            </a:r>
+          </a:p>
+        </p:txBody>
+      </p:sp>
+      <p:sp>
+        <p:nvSpPr>
+          <p:cNvPr id="5" name="TextBox 4"/>
           <p:cNvSpPr txBox="1"/>
           <p:nvPr/>
         </p:nvSpPr>
@@ -4545,6 +4678,557 @@
                 </a:solidFill>
                 <a:latin typeface="Calibri"/>
               </a:rPr>
+              <a:t>Browser lab track</a:t>
+            </a:r>
+          </a:p>
+        </p:txBody>
+      </p:sp>
+      <p:sp>
+        <p:nvSpPr>
+          <p:cNvPr id="3" name="TextBox 2"/>
+          <p:cNvSpPr txBox="1"/>
+          <p:nvPr/>
+        </p:nvSpPr>
+        <p:spPr>
+          <a:xfrm>
+            <a:off x="548640" y="1234440"/>
+            <a:ext cx="11064240" cy="4937760"/>
+          </a:xfrm>
+          <a:prstGeom prst="rect">
+            <a:avLst/>
+          </a:prstGeom>
+          <a:noFill/>
+        </p:spPr>
+        <p:txBody>
+          <a:bodyPr wrap="square">
+            <a:noAutofit/>
+          </a:bodyPr>
+          <a:lstStyle/>
+          <a:p>
+            <a:pPr lvl="0" marL="457200" indent="-228600">
+              <a:buFont typeface="Calibri"/>
+              <a:spcAft>
+                <a:spcPts val="1000"/>
+              </a:spcAft>
+              <a:buSzPct val="100000"/>
+              <a:buChar char="•"/>
+              <a:lnSpc>
+                <a:spcPts val="2200"/>
+              </a:lnSpc>
+            </a:pPr>
+            <a:r>
+              <a:rPr sz="2000" b="0">
+                <a:solidFill>
+                  <a:srgbClr val="333333"/>
+                </a:solidFill>
+                <a:latin typeface="Calibri"/>
+              </a:rPr>
+              <a:t>In the browser lab track, open the </a:t>
+            </a:r>
+            <a:r>
+              <a:rPr sz="2000" b="1">
+                <a:solidFill>
+                  <a:srgbClr val="333333"/>
+                </a:solidFill>
+                <a:latin typeface="Calibri"/>
+              </a:rPr>
+              <a:t>hypergraph-partition</a:t>
+            </a:r>
+            <a:r>
+              <a:rPr sz="2000" b="0">
+                <a:solidFill>
+                  <a:srgbClr val="333333"/>
+                </a:solidFill>
+                <a:latin typeface="Calibri"/>
+              </a:rPr>
+              <a:t> lab from the tools shelf</a:t>
+            </a:r>
+          </a:p>
+          <a:p>
+            <a:pPr lvl="0" marL="457200" indent="-228600">
+              <a:buFont typeface="Calibri"/>
+              <a:spcAft>
+                <a:spcPts val="1000"/>
+              </a:spcAft>
+              <a:buSzPct val="100000"/>
+              <a:buChar char="•"/>
+              <a:lnSpc>
+                <a:spcPts val="2200"/>
+              </a:lnSpc>
+            </a:pPr>
+            <a:r>
+              <a:rPr sz="2000" b="0">
+                <a:solidFill>
+                  <a:srgbClr val="333333"/>
+                </a:solidFill>
+                <a:latin typeface="Calibri"/>
+              </a:rPr>
+              <a:t>Load the starter graph, run the algorithm once</a:t>
+            </a:r>
+          </a:p>
+          <a:p>
+            <a:pPr lvl="0" marL="457200" indent="-228600">
+              <a:buFont typeface="Calibri"/>
+              <a:spcAft>
+                <a:spcPts val="1000"/>
+              </a:spcAft>
+              <a:buSzPct val="100000"/>
+              <a:buChar char="•"/>
+              <a:lnSpc>
+                <a:spcPts val="2200"/>
+              </a:lnSpc>
+            </a:pPr>
+            <a:r>
+              <a:rPr sz="2000" b="0">
+                <a:solidFill>
+                  <a:srgbClr val="333333"/>
+                </a:solidFill>
+                <a:latin typeface="Calibri"/>
+              </a:rPr>
+              <a:t>Work the challenges that lock the goldens</a:t>
+            </a:r>
+          </a:p>
+        </p:txBody>
+      </p:sp>
+      <p:sp>
+        <p:nvSpPr>
+          <p:cNvPr id="4" name="TextBox 3"/>
+          <p:cNvSpPr txBox="1"/>
+          <p:nvPr/>
+        </p:nvSpPr>
+        <p:spPr>
+          <a:xfrm>
+            <a:off x="548640" y="6355080"/>
+            <a:ext cx="11064240" cy="320040"/>
+          </a:xfrm>
+          <a:prstGeom prst="rect">
+            <a:avLst/>
+          </a:prstGeom>
+          <a:noFill/>
+        </p:spPr>
+        <p:txBody>
+          <a:bodyPr wrap="square">
+            <a:noAutofit/>
+          </a:bodyPr>
+          <a:lstStyle/>
+          <a:p>
+            <a:pPr algn="r">
+              <a:lnSpc>
+                <a:spcPts val="2200"/>
+              </a:lnSpc>
+              <a:defRPr sz="1000" b="0">
+                <a:solidFill>
+                  <a:srgbClr val="666666"/>
+                </a:solidFill>
+                <a:latin typeface="Calibri"/>
+              </a:defRPr>
+            </a:pPr>
+            <a:r>
+              <a:t>learn_partitioning — 05 hypergraph partition</a:t>
+            </a:r>
+          </a:p>
+        </p:txBody>
+      </p:sp>
+    </p:spTree>
+  </p:cSld>
+  <p:clrMapOvr>
+    <a:masterClrMapping/>
+  </p:clrMapOvr>
+</p:sld>
+</file>
+
+<file path=ppt/slides/slide12.xml><?xml version="1.0" encoding="utf-8"?>
+<p:sld xmlns:a="http://schemas.openxmlformats.org/drawingml/2006/main" xmlns:p="http://schemas.openxmlformats.org/presentationml/2006/main" xmlns:r="http://schemas.openxmlformats.org/officeDocument/2006/relationships">
+  <p:cSld>
+    <p:spTree>
+      <p:nvGrpSpPr>
+        <p:cNvPr id="1" name=""/>
+        <p:cNvGrpSpPr/>
+        <p:nvPr/>
+      </p:nvGrpSpPr>
+      <p:grpSpPr/>
+      <p:sp>
+        <p:nvSpPr>
+          <p:cNvPr id="2" name="TextBox 1"/>
+          <p:cNvSpPr txBox="1"/>
+          <p:nvPr/>
+        </p:nvSpPr>
+        <p:spPr>
+          <a:xfrm>
+            <a:off x="548640" y="411480"/>
+            <a:ext cx="11064240" cy="777240"/>
+          </a:xfrm>
+          <a:prstGeom prst="rect">
+            <a:avLst/>
+          </a:prstGeom>
+          <a:noFill/>
+        </p:spPr>
+        <p:txBody>
+          <a:bodyPr wrap="square">
+            <a:noAutofit/>
+          </a:bodyPr>
+          <a:lstStyle/>
+          <a:p>
+            <a:pPr>
+              <a:lnSpc>
+                <a:spcPts val="2200"/>
+              </a:lnSpc>
+            </a:pPr>
+            <a:r>
+              <a:rPr sz="2800" b="1">
+                <a:solidFill>
+                  <a:srgbClr val="1A1A2E"/>
+                </a:solidFill>
+                <a:latin typeface="Calibri"/>
+              </a:rPr>
+              <a:t>Implement track</a:t>
+            </a:r>
+          </a:p>
+        </p:txBody>
+      </p:sp>
+      <p:sp>
+        <p:nvSpPr>
+          <p:cNvPr id="3" name="TextBox 2"/>
+          <p:cNvSpPr txBox="1"/>
+          <p:nvPr/>
+        </p:nvSpPr>
+        <p:spPr>
+          <a:xfrm>
+            <a:off x="548640" y="1234440"/>
+            <a:ext cx="11064240" cy="4937760"/>
+          </a:xfrm>
+          <a:prstGeom prst="rect">
+            <a:avLst/>
+          </a:prstGeom>
+          <a:noFill/>
+        </p:spPr>
+        <p:txBody>
+          <a:bodyPr wrap="square">
+            <a:noAutofit/>
+          </a:bodyPr>
+          <a:lstStyle/>
+          <a:p>
+            <a:pPr lvl="0" marL="457200" indent="-228600">
+              <a:buFont typeface="Calibri"/>
+              <a:spcAft>
+                <a:spcPts val="1000"/>
+              </a:spcAft>
+              <a:buSzPct val="100000"/>
+              <a:buChar char="•"/>
+              <a:lnSpc>
+                <a:spcPts val="2200"/>
+              </a:lnSpc>
+            </a:pPr>
+            <a:r>
+              <a:rPr sz="2000" b="0">
+                <a:solidFill>
+                  <a:srgbClr val="333333"/>
+                </a:solidFill>
+                <a:latin typeface="Calibri"/>
+              </a:rPr>
+              <a:t>In the implement track</a:t>
+            </a:r>
+          </a:p>
+          <a:p>
+            <a:pPr lvl="0" marL="457200" indent="-228600">
+              <a:buFont typeface="Calibri"/>
+              <a:spcAft>
+                <a:spcPts val="1000"/>
+              </a:spcAft>
+              <a:buSzPct val="100000"/>
+              <a:buChar char="•"/>
+              <a:lnSpc>
+                <a:spcPts val="2200"/>
+              </a:lnSpc>
+            </a:pPr>
+            <a:r>
+              <a:rPr sz="2000" b="0">
+                <a:solidFill>
+                  <a:srgbClr val="333333"/>
+                </a:solidFill>
+                <a:latin typeface="Calibri"/>
+              </a:rPr>
+              <a:t>Parse the tiny graph, run the algorithm with a deterministic seed</a:t>
+            </a:r>
+          </a:p>
+          <a:p>
+            <a:pPr lvl="0" marL="457200" indent="-228600">
+              <a:buFont typeface="Calibri"/>
+              <a:spcAft>
+                <a:spcPts val="1000"/>
+              </a:spcAft>
+              <a:buSzPct val="100000"/>
+              <a:buChar char="•"/>
+              <a:lnSpc>
+                <a:spcPts val="2200"/>
+              </a:lnSpc>
+            </a:pPr>
+            <a:r>
+              <a:rPr sz="2000" b="0">
+                <a:solidFill>
+                  <a:srgbClr val="333333"/>
+                </a:solidFill>
+                <a:latin typeface="Calibri"/>
+              </a:rPr>
+              <a:t>Match the browser goldens before you claim the checklist</a:t>
+            </a:r>
+          </a:p>
+        </p:txBody>
+      </p:sp>
+      <p:sp>
+        <p:nvSpPr>
+          <p:cNvPr id="4" name="TextBox 3"/>
+          <p:cNvSpPr txBox="1"/>
+          <p:nvPr/>
+        </p:nvSpPr>
+        <p:spPr>
+          <a:xfrm>
+            <a:off x="548640" y="6355080"/>
+            <a:ext cx="11064240" cy="320040"/>
+          </a:xfrm>
+          <a:prstGeom prst="rect">
+            <a:avLst/>
+          </a:prstGeom>
+          <a:noFill/>
+        </p:spPr>
+        <p:txBody>
+          <a:bodyPr wrap="square">
+            <a:noAutofit/>
+          </a:bodyPr>
+          <a:lstStyle/>
+          <a:p>
+            <a:pPr algn="r">
+              <a:lnSpc>
+                <a:spcPts val="2200"/>
+              </a:lnSpc>
+              <a:defRPr sz="1000" b="0">
+                <a:solidFill>
+                  <a:srgbClr val="666666"/>
+                </a:solidFill>
+                <a:latin typeface="Calibri"/>
+              </a:defRPr>
+            </a:pPr>
+            <a:r>
+              <a:t>learn_partitioning — 05 hypergraph partition</a:t>
+            </a:r>
+          </a:p>
+        </p:txBody>
+      </p:sp>
+    </p:spTree>
+  </p:cSld>
+  <p:clrMapOvr>
+    <a:masterClrMapping/>
+  </p:clrMapOvr>
+</p:sld>
+</file>
+
+<file path=ppt/slides/slide13.xml><?xml version="1.0" encoding="utf-8"?>
+<p:sld xmlns:a="http://schemas.openxmlformats.org/drawingml/2006/main" xmlns:p="http://schemas.openxmlformats.org/presentationml/2006/main" xmlns:r="http://schemas.openxmlformats.org/officeDocument/2006/relationships">
+  <p:cSld>
+    <p:spTree>
+      <p:nvGrpSpPr>
+        <p:cNvPr id="1" name=""/>
+        <p:cNvGrpSpPr/>
+        <p:nvPr/>
+      </p:nvGrpSpPr>
+      <p:grpSpPr/>
+      <p:sp>
+        <p:nvSpPr>
+          <p:cNvPr id="2" name="TextBox 1"/>
+          <p:cNvSpPr txBox="1"/>
+          <p:nvPr/>
+        </p:nvSpPr>
+        <p:spPr>
+          <a:xfrm>
+            <a:off x="548640" y="411480"/>
+            <a:ext cx="11064240" cy="777240"/>
+          </a:xfrm>
+          <a:prstGeom prst="rect">
+            <a:avLst/>
+          </a:prstGeom>
+          <a:noFill/>
+        </p:spPr>
+        <p:txBody>
+          <a:bodyPr wrap="square">
+            <a:noAutofit/>
+          </a:bodyPr>
+          <a:lstStyle/>
+          <a:p>
+            <a:pPr>
+              <a:lnSpc>
+                <a:spcPts val="2200"/>
+              </a:lnSpc>
+            </a:pPr>
+            <a:r>
+              <a:rPr sz="2800" b="1">
+                <a:solidFill>
+                  <a:srgbClr val="1A1A2E"/>
+                </a:solidFill>
+                <a:latin typeface="Calibri"/>
+              </a:rPr>
+              <a:t>Pitfalls</a:t>
+            </a:r>
+          </a:p>
+        </p:txBody>
+      </p:sp>
+      <p:sp>
+        <p:nvSpPr>
+          <p:cNvPr id="3" name="TextBox 2"/>
+          <p:cNvSpPr txBox="1"/>
+          <p:nvPr/>
+        </p:nvSpPr>
+        <p:spPr>
+          <a:xfrm>
+            <a:off x="548640" y="1234440"/>
+            <a:ext cx="11064240" cy="4937760"/>
+          </a:xfrm>
+          <a:prstGeom prst="rect">
+            <a:avLst/>
+          </a:prstGeom>
+          <a:noFill/>
+        </p:spPr>
+        <p:txBody>
+          <a:bodyPr wrap="square">
+            <a:noAutofit/>
+          </a:bodyPr>
+          <a:lstStyle/>
+          <a:p>
+            <a:pPr lvl="0" marL="457200" indent="-228600">
+              <a:buFont typeface="Calibri"/>
+              <a:spcAft>
+                <a:spcPts val="1000"/>
+              </a:spcAft>
+              <a:buSzPct val="100000"/>
+              <a:buChar char="•"/>
+              <a:lnSpc>
+                <a:spcPts val="2200"/>
+              </a:lnSpc>
+            </a:pPr>
+            <a:r>
+              <a:rPr sz="2000" b="0">
+                <a:solidFill>
+                  <a:srgbClr val="333333"/>
+                </a:solidFill>
+                <a:latin typeface="Calibri"/>
+              </a:rPr>
+              <a:t>Common traps</a:t>
+            </a:r>
+          </a:p>
+          <a:p>
+            <a:pPr lvl="0" marL="457200" indent="-228600">
+              <a:buFont typeface="Calibri"/>
+              <a:spcAft>
+                <a:spcPts val="1000"/>
+              </a:spcAft>
+              <a:buSzPct val="100000"/>
+              <a:buChar char="•"/>
+              <a:lnSpc>
+                <a:spcPts val="2200"/>
+              </a:lnSpc>
+            </a:pPr>
+            <a:r>
+              <a:rPr sz="2000" b="0">
+                <a:solidFill>
+                  <a:srgbClr val="333333"/>
+                </a:solidFill>
+                <a:latin typeface="Calibri"/>
+              </a:rPr>
+              <a:t>For multilevel flows, verify coarsening before you blame the refiner</a:t>
+            </a:r>
+          </a:p>
+        </p:txBody>
+      </p:sp>
+      <p:sp>
+        <p:nvSpPr>
+          <p:cNvPr id="4" name="TextBox 3"/>
+          <p:cNvSpPr txBox="1"/>
+          <p:nvPr/>
+        </p:nvSpPr>
+        <p:spPr>
+          <a:xfrm>
+            <a:off x="548640" y="6355080"/>
+            <a:ext cx="11064240" cy="320040"/>
+          </a:xfrm>
+          <a:prstGeom prst="rect">
+            <a:avLst/>
+          </a:prstGeom>
+          <a:noFill/>
+        </p:spPr>
+        <p:txBody>
+          <a:bodyPr wrap="square">
+            <a:noAutofit/>
+          </a:bodyPr>
+          <a:lstStyle/>
+          <a:p>
+            <a:pPr algn="r">
+              <a:lnSpc>
+                <a:spcPts val="2200"/>
+              </a:lnSpc>
+              <a:defRPr sz="1000" b="0">
+                <a:solidFill>
+                  <a:srgbClr val="666666"/>
+                </a:solidFill>
+                <a:latin typeface="Calibri"/>
+              </a:defRPr>
+            </a:pPr>
+            <a:r>
+              <a:t>learn_partitioning — 05 hypergraph partition</a:t>
+            </a:r>
+          </a:p>
+        </p:txBody>
+      </p:sp>
+    </p:spTree>
+  </p:cSld>
+  <p:clrMapOvr>
+    <a:masterClrMapping/>
+  </p:clrMapOvr>
+</p:sld>
+</file>
+
+<file path=ppt/slides/slide14.xml><?xml version="1.0" encoding="utf-8"?>
+<p:sld xmlns:a="http://schemas.openxmlformats.org/drawingml/2006/main" xmlns:p="http://schemas.openxmlformats.org/presentationml/2006/main" xmlns:r="http://schemas.openxmlformats.org/officeDocument/2006/relationships">
+  <p:cSld>
+    <p:spTree>
+      <p:nvGrpSpPr>
+        <p:cNvPr id="1" name=""/>
+        <p:cNvGrpSpPr/>
+        <p:nvPr/>
+      </p:nvGrpSpPr>
+      <p:grpSpPr/>
+      <p:sp>
+        <p:nvSpPr>
+          <p:cNvPr id="2" name="TextBox 1"/>
+          <p:cNvSpPr txBox="1"/>
+          <p:nvPr/>
+        </p:nvSpPr>
+        <p:spPr>
+          <a:xfrm>
+            <a:off x="548640" y="411480"/>
+            <a:ext cx="11064240" cy="777240"/>
+          </a:xfrm>
+          <a:prstGeom prst="rect">
+            <a:avLst/>
+          </a:prstGeom>
+          <a:noFill/>
+        </p:spPr>
+        <p:txBody>
+          <a:bodyPr wrap="square">
+            <a:noAutofit/>
+          </a:bodyPr>
+          <a:lstStyle/>
+          <a:p>
+            <a:pPr>
+              <a:lnSpc>
+                <a:spcPts val="2200"/>
+              </a:lnSpc>
+            </a:pPr>
+            <a:r>
+              <a:rPr sz="2800" b="1">
+                <a:solidFill>
+                  <a:srgbClr val="1A1A2E"/>
+                </a:solidFill>
+                <a:latin typeface="Calibri"/>
+              </a:rPr>
               <a:t>Your turn</a:t>
             </a:r>
           </a:p>
@@ -4822,6 +5506,125 @@
               <a:t>Use clique expansion only for drawing or as a heuristic substrate</a:t>
             </a:r>
           </a:p>
+        </p:txBody>
+      </p:sp>
+      <p:sp>
+        <p:nvSpPr>
+          <p:cNvPr id="4" name="TextBox 3"/>
+          <p:cNvSpPr txBox="1"/>
+          <p:nvPr/>
+        </p:nvSpPr>
+        <p:spPr>
+          <a:xfrm>
+            <a:off x="548640" y="6355080"/>
+            <a:ext cx="11064240" cy="320040"/>
+          </a:xfrm>
+          <a:prstGeom prst="rect">
+            <a:avLst/>
+          </a:prstGeom>
+          <a:noFill/>
+        </p:spPr>
+        <p:txBody>
+          <a:bodyPr wrap="square">
+            <a:noAutofit/>
+          </a:bodyPr>
+          <a:lstStyle/>
+          <a:p>
+            <a:pPr algn="r">
+              <a:lnSpc>
+                <a:spcPts val="2200"/>
+              </a:lnSpc>
+              <a:defRPr sz="1000" b="0">
+                <a:solidFill>
+                  <a:srgbClr val="666666"/>
+                </a:solidFill>
+                <a:latin typeface="Calibri"/>
+              </a:defRPr>
+            </a:pPr>
+            <a:r>
+              <a:t>learn_partitioning — 05 hypergraph partition</a:t>
+            </a:r>
+          </a:p>
+        </p:txBody>
+      </p:sp>
+    </p:spTree>
+  </p:cSld>
+  <p:clrMapOvr>
+    <a:masterClrMapping/>
+  </p:clrMapOvr>
+</p:sld>
+</file>
+
+<file path=ppt/slides/slide3.xml><?xml version="1.0" encoding="utf-8"?>
+<p:sld xmlns:a="http://schemas.openxmlformats.org/drawingml/2006/main" xmlns:p="http://schemas.openxmlformats.org/presentationml/2006/main" xmlns:r="http://schemas.openxmlformats.org/officeDocument/2006/relationships">
+  <p:cSld>
+    <p:spTree>
+      <p:nvGrpSpPr>
+        <p:cNvPr id="1" name=""/>
+        <p:cNvGrpSpPr/>
+        <p:nvPr/>
+      </p:nvGrpSpPr>
+      <p:grpSpPr/>
+      <p:sp>
+        <p:nvSpPr>
+          <p:cNvPr id="2" name="TextBox 1"/>
+          <p:cNvSpPr txBox="1"/>
+          <p:nvPr/>
+        </p:nvSpPr>
+        <p:spPr>
+          <a:xfrm>
+            <a:off x="548640" y="411480"/>
+            <a:ext cx="11064240" cy="777240"/>
+          </a:xfrm>
+          <a:prstGeom prst="rect">
+            <a:avLst/>
+          </a:prstGeom>
+          <a:noFill/>
+        </p:spPr>
+        <p:txBody>
+          <a:bodyPr wrap="square">
+            <a:noAutofit/>
+          </a:bodyPr>
+          <a:lstStyle/>
+          <a:p>
+            <a:pPr>
+              <a:lnSpc>
+                <a:spcPts val="2200"/>
+              </a:lnSpc>
+            </a:pPr>
+            <a:r>
+              <a:rPr sz="2800" b="1">
+                <a:solidFill>
+                  <a:srgbClr val="1A1A2E"/>
+                </a:solidFill>
+                <a:latin typeface="Calibri"/>
+              </a:rPr>
+              <a:t>Pseudocode</a:t>
+            </a:r>
+          </a:p>
+        </p:txBody>
+      </p:sp>
+      <p:sp>
+        <p:nvSpPr>
+          <p:cNvPr id="3" name="TextBox 2"/>
+          <p:cNvSpPr txBox="1"/>
+          <p:nvPr/>
+        </p:nvSpPr>
+        <p:spPr>
+          <a:xfrm>
+            <a:off x="548640" y="1234440"/>
+            <a:ext cx="11064240" cy="4937760"/>
+          </a:xfrm>
+          <a:prstGeom prst="rect">
+            <a:avLst/>
+          </a:prstGeom>
+          <a:noFill/>
+        </p:spPr>
+        <p:txBody>
+          <a:bodyPr wrap="square">
+            <a:noAutofit/>
+          </a:bodyPr>
+          <a:lstStyle/>
           <a:p>
             <a:pPr lvl="0" marL="457200" indent="-228600">
               <a:buFont typeface="Calibri"/>
@@ -4841,7 +5644,73 @@
                 </a:solidFill>
                 <a:latin typeface="Calibri"/>
               </a:rPr>
-              <a:t>&lt;!-- algorithm-walkthrough --&gt;</a:t>
+              <a:t>Hypergraph cut counts a net once if it spans more than one part</a:t>
+            </a:r>
+          </a:p>
+          <a:p>
+            <a:pPr lvl="0" marL="457200" indent="-228600">
+              <a:buFont typeface="Calibri"/>
+              <a:spcAft>
+                <a:spcPts val="1000"/>
+              </a:spcAft>
+              <a:buSzPct val="100000"/>
+              <a:buChar char="•"/>
+              <a:lnSpc>
+                <a:spcPts val="2200"/>
+              </a:lnSpc>
+            </a:pPr>
+            <a:r>
+              <a:rPr sz="2000" b="0">
+                <a:solidFill>
+                  <a:srgbClr val="333333"/>
+                </a:solidFill>
+                <a:latin typeface="Calibri"/>
+              </a:rPr>
+              <a:t>Pseudocode is a span check per hyperedge</a:t>
+            </a:r>
+          </a:p>
+          <a:p>
+            <a:pPr lvl="0" marL="457200" indent="-228600">
+              <a:buFont typeface="Calibri"/>
+              <a:spcAft>
+                <a:spcPts val="1000"/>
+              </a:spcAft>
+              <a:buSzPct val="100000"/>
+              <a:buChar char="•"/>
+              <a:lnSpc>
+                <a:spcPts val="2200"/>
+              </a:lnSpc>
+            </a:pPr>
+            <a:r>
+              <a:rPr sz="2000" b="0">
+                <a:solidFill>
+                  <a:srgbClr val="333333"/>
+                </a:solidFill>
+                <a:latin typeface="Calibri"/>
+              </a:rPr>
+              <a:t>Open this module's examples file and find the Pseudocode section</a:t>
+            </a:r>
+          </a:p>
+          <a:p>
+            <a:pPr lvl="0" marL="457200" indent="-228600">
+              <a:buFont typeface="Calibri"/>
+              <a:spcAft>
+                <a:spcPts val="1000"/>
+              </a:spcAft>
+              <a:buSzPct val="100000"/>
+              <a:buChar char="•"/>
+              <a:lnSpc>
+                <a:spcPts val="2200"/>
+              </a:lnSpc>
+            </a:pPr>
+            <a:r>
+              <a:rPr sz="2000" b="0">
+                <a:solidFill>
+                  <a:srgbClr val="333333"/>
+                </a:solidFill>
+                <a:latin typeface="Calibri"/>
+              </a:rPr>
+              <a:t>That written sketch is what you implement on the implement track and what the browser</a:t>
             </a:r>
           </a:p>
         </p:txBody>
@@ -4893,7 +5762,405 @@
 </p:sld>
 </file>
 
-<file path=ppt/slides/slide3.xml><?xml version="1.0" encoding="utf-8"?>
+<file path=ppt/slides/slide4.xml><?xml version="1.0" encoding="utf-8"?>
+<p:sld xmlns:a="http://schemas.openxmlformats.org/drawingml/2006/main" xmlns:p="http://schemas.openxmlformats.org/presentationml/2006/main" xmlns:r="http://schemas.openxmlformats.org/officeDocument/2006/relationships">
+  <p:cSld>
+    <p:spTree>
+      <p:nvGrpSpPr>
+        <p:cNvPr id="1" name=""/>
+        <p:cNvGrpSpPr/>
+        <p:nvPr/>
+      </p:nvGrpSpPr>
+      <p:grpSpPr/>
+      <p:sp>
+        <p:nvSpPr>
+          <p:cNvPr id="2" name="TextBox 1"/>
+          <p:cNvSpPr txBox="1"/>
+          <p:nvPr/>
+        </p:nvSpPr>
+        <p:spPr>
+          <a:xfrm>
+            <a:off x="548640" y="411480"/>
+            <a:ext cx="11064240" cy="777240"/>
+          </a:xfrm>
+          <a:prstGeom prst="rect">
+            <a:avLst/>
+          </a:prstGeom>
+          <a:noFill/>
+        </p:spPr>
+        <p:txBody>
+          <a:bodyPr wrap="square">
+            <a:noAutofit/>
+          </a:bodyPr>
+          <a:lstStyle/>
+          <a:p>
+            <a:pPr>
+              <a:lnSpc>
+                <a:spcPts val="2200"/>
+              </a:lnSpc>
+            </a:pPr>
+            <a:r>
+              <a:rPr sz="2800" b="1">
+                <a:solidFill>
+                  <a:srgbClr val="1A1A2E"/>
+                </a:solidFill>
+                <a:latin typeface="Calibri"/>
+              </a:rPr>
+              <a:t>Algorithm sketch</a:t>
+            </a:r>
+          </a:p>
+        </p:txBody>
+      </p:sp>
+      <p:sp>
+        <p:nvSpPr>
+          <p:cNvPr id="3" name="TextBox 2"/>
+          <p:cNvSpPr txBox="1"/>
+          <p:nvPr/>
+        </p:nvSpPr>
+        <p:spPr>
+          <a:xfrm>
+            <a:off x="548640" y="1234440"/>
+            <a:ext cx="11064240" cy="4937760"/>
+          </a:xfrm>
+          <a:prstGeom prst="rect">
+            <a:avLst/>
+          </a:prstGeom>
+          <a:noFill/>
+        </p:spPr>
+        <p:txBody>
+          <a:bodyPr wrap="square">
+            <a:noAutofit/>
+          </a:bodyPr>
+          <a:lstStyle/>
+          <a:p>
+            <a:pPr lvl="0" marL="457200" indent="-228600">
+              <a:buFont typeface="Calibri"/>
+              <a:spcAft>
+                <a:spcPts val="1000"/>
+              </a:spcAft>
+              <a:buSzPct val="100000"/>
+              <a:buChar char="•"/>
+              <a:lnSpc>
+                <a:spcPts val="2200"/>
+              </a:lnSpc>
+            </a:pPr>
+            <a:r>
+              <a:rPr sz="2000" b="0">
+                <a:solidFill>
+                  <a:srgbClr val="333333"/>
+                </a:solidFill>
+                <a:latin typeface="Calibri"/>
+              </a:rPr>
+              <a:t>On the starter hypergraph, golden ABC versus DE leaves a single cut net</a:t>
+            </a:r>
+          </a:p>
+          <a:p>
+            <a:pPr lvl="0" marL="457200" indent="-228600">
+              <a:buFont typeface="Calibri"/>
+              <a:spcAft>
+                <a:spcPts val="1000"/>
+              </a:spcAft>
+              <a:buSzPct val="100000"/>
+              <a:buChar char="•"/>
+              <a:lnSpc>
+                <a:spcPts val="2200"/>
+              </a:lnSpc>
+            </a:pPr>
+            <a:r>
+              <a:rPr sz="2000" b="0">
+                <a:solidFill>
+                  <a:srgbClr val="333333"/>
+                </a:solidFill>
+                <a:latin typeface="Calibri"/>
+              </a:rPr>
+              <a:t>Expanding to a clique can tell a different numeric story, report which model you used</a:t>
+            </a:r>
+          </a:p>
+        </p:txBody>
+      </p:sp>
+      <p:sp>
+        <p:nvSpPr>
+          <p:cNvPr id="4" name="TextBox 3"/>
+          <p:cNvSpPr txBox="1"/>
+          <p:nvPr/>
+        </p:nvSpPr>
+        <p:spPr>
+          <a:xfrm>
+            <a:off x="548640" y="6355080"/>
+            <a:ext cx="11064240" cy="320040"/>
+          </a:xfrm>
+          <a:prstGeom prst="rect">
+            <a:avLst/>
+          </a:prstGeom>
+          <a:noFill/>
+        </p:spPr>
+        <p:txBody>
+          <a:bodyPr wrap="square">
+            <a:noAutofit/>
+          </a:bodyPr>
+          <a:lstStyle/>
+          <a:p>
+            <a:pPr algn="r">
+              <a:lnSpc>
+                <a:spcPts val="2200"/>
+              </a:lnSpc>
+              <a:defRPr sz="1000" b="0">
+                <a:solidFill>
+                  <a:srgbClr val="666666"/>
+                </a:solidFill>
+                <a:latin typeface="Calibri"/>
+              </a:defRPr>
+            </a:pPr>
+            <a:r>
+              <a:t>learn_partitioning — 05 hypergraph partition</a:t>
+            </a:r>
+          </a:p>
+        </p:txBody>
+      </p:sp>
+    </p:spTree>
+  </p:cSld>
+  <p:clrMapOvr>
+    <a:masterClrMapping/>
+  </p:clrMapOvr>
+</p:sld>
+</file>
+
+<file path=ppt/slides/slide5.xml><?xml version="1.0" encoding="utf-8"?>
+<p:sld xmlns:a="http://schemas.openxmlformats.org/drawingml/2006/main" xmlns:p="http://schemas.openxmlformats.org/presentationml/2006/main" xmlns:r="http://schemas.openxmlformats.org/officeDocument/2006/relationships">
+  <p:cSld>
+    <p:spTree>
+      <p:nvGrpSpPr>
+        <p:cNvPr id="1" name=""/>
+        <p:cNvGrpSpPr/>
+        <p:nvPr/>
+      </p:nvGrpSpPr>
+      <p:grpSpPr/>
+      <p:sp>
+        <p:nvSpPr>
+          <p:cNvPr id="2" name="TextBox 1"/>
+          <p:cNvSpPr txBox="1"/>
+          <p:nvPr/>
+        </p:nvSpPr>
+        <p:spPr>
+          <a:xfrm>
+            <a:off x="548640" y="411480"/>
+            <a:ext cx="11064240" cy="777240"/>
+          </a:xfrm>
+          <a:prstGeom prst="rect">
+            <a:avLst/>
+          </a:prstGeom>
+          <a:noFill/>
+        </p:spPr>
+        <p:txBody>
+          <a:bodyPr wrap="square">
+            <a:noAutofit/>
+          </a:bodyPr>
+          <a:lstStyle/>
+          <a:p>
+            <a:pPr>
+              <a:lnSpc>
+                <a:spcPts val="2200"/>
+              </a:lnSpc>
+            </a:pPr>
+            <a:r>
+              <a:rPr sz="2800" b="1">
+                <a:solidFill>
+                  <a:srgbClr val="1A1A2E"/>
+                </a:solidFill>
+                <a:latin typeface="Calibri"/>
+              </a:rPr>
+              <a:t>Algorithm sketch — try these</a:t>
+            </a:r>
+          </a:p>
+        </p:txBody>
+      </p:sp>
+      <p:sp>
+        <p:nvSpPr>
+          <p:cNvPr id="3" name="TextBox 2"/>
+          <p:cNvSpPr txBox="1"/>
+          <p:nvPr/>
+        </p:nvSpPr>
+        <p:spPr>
+          <a:xfrm>
+            <a:off x="548640" y="1143000"/>
+            <a:ext cx="11064240" cy="5029200"/>
+          </a:xfrm>
+          <a:prstGeom prst="rect">
+            <a:avLst/>
+          </a:prstGeom>
+          <a:solidFill>
+            <a:srgbClr val="F4F4F4"/>
+          </a:solidFill>
+        </p:spPr>
+        <p:txBody>
+          <a:bodyPr wrap="square">
+            <a:noAutofit/>
+          </a:bodyPr>
+          <a:lstStyle/>
+          <a:p>
+            <a:pPr>
+              <a:lnSpc>
+                <a:spcPts val="2200"/>
+              </a:lnSpc>
+              <a:spcAft>
+                <a:spcPts val="400"/>
+              </a:spcAft>
+            </a:pPr>
+            <a:r>
+              <a:rPr sz="2000" b="0">
+                <a:solidFill>
+                  <a:srgbClr val="333333"/>
+                </a:solidFill>
+                <a:latin typeface="Consolas"/>
+              </a:rPr>
+              <a:t>INPUT: hyperedges e={pins…}, side[]</a:t>
+            </a:r>
+          </a:p>
+          <a:p>
+            <a:pPr>
+              <a:lnSpc>
+                <a:spcPts val="2200"/>
+              </a:lnSpc>
+              <a:spcAft>
+                <a:spcPts val="400"/>
+              </a:spcAft>
+            </a:pPr>
+            <a:r>
+              <a:rPr sz="2000" b="0">
+                <a:solidFill>
+                  <a:srgbClr val="333333"/>
+                </a:solidFill>
+                <a:latin typeface="Consolas"/>
+              </a:rPr>
+              <a:t>OUTPUT: hyperedge_cut</a:t>
+            </a:r>
+          </a:p>
+          <a:p>
+            <a:pPr>
+              <a:lnSpc>
+                <a:spcPts val="2200"/>
+              </a:lnSpc>
+              <a:spcAft>
+                <a:spcPts val="400"/>
+              </a:spcAft>
+            </a:pPr>
+            <a:r>
+              <a:rPr sz="2000" b="0">
+                <a:solidFill>
+                  <a:srgbClr val="333333"/>
+                </a:solidFill>
+                <a:latin typeface="Consolas"/>
+              </a:rPr>
+              <a:t>cut ← count edges with |{side[p]:p∈e}| &gt; 1</a:t>
+            </a:r>
+          </a:p>
+          <a:p>
+            <a:pPr>
+              <a:lnSpc>
+                <a:spcPts val="2200"/>
+              </a:lnSpc>
+              <a:spcAft>
+                <a:spcPts val="400"/>
+              </a:spcAft>
+            </a:pPr>
+            <a:r>
+              <a:rPr sz="2000" b="0">
+                <a:solidFill>
+                  <a:srgbClr val="333333"/>
+                </a:solidFill>
+                <a:latin typeface="Consolas"/>
+              </a:rPr>
+              <a:t>(optional) expand to pairwise clique for KL/FM</a:t>
+            </a:r>
+          </a:p>
+          <a:p>
+            <a:pPr>
+              <a:lnSpc>
+                <a:spcPts val="2200"/>
+              </a:lnSpc>
+              <a:spcAft>
+                <a:spcPts val="400"/>
+              </a:spcAft>
+            </a:pPr>
+            <a:r>
+              <a:rPr sz="2000" b="0">
+                <a:solidFill>
+                  <a:srgbClr val="333333"/>
+                </a:solidFill>
+                <a:latin typeface="Consolas"/>
+              </a:rPr>
+              <a:t>GOLDEN ABC|DE: one cut net on starter H</a:t>
+            </a:r>
+          </a:p>
+          <a:p>
+            <a:pPr>
+              <a:lnSpc>
+                <a:spcPts val="2200"/>
+              </a:lnSpc>
+              <a:spcAft>
+                <a:spcPts val="400"/>
+              </a:spcAft>
+            </a:pPr>
+            <a:r>
+              <a:rPr sz="2000" b="0">
+                <a:solidFill>
+                  <a:srgbClr val="333333"/>
+                </a:solidFill>
+                <a:latin typeface="Consolas"/>
+              </a:rPr>
+              <a:t>pairwise clique expansion can differ</a:t>
+            </a:r>
+          </a:p>
+        </p:txBody>
+      </p:sp>
+      <p:sp>
+        <p:nvSpPr>
+          <p:cNvPr id="4" name="TextBox 3"/>
+          <p:cNvSpPr txBox="1"/>
+          <p:nvPr/>
+        </p:nvSpPr>
+        <p:spPr>
+          <a:xfrm>
+            <a:off x="548640" y="6355080"/>
+            <a:ext cx="11064240" cy="320040"/>
+          </a:xfrm>
+          <a:prstGeom prst="rect">
+            <a:avLst/>
+          </a:prstGeom>
+          <a:noFill/>
+        </p:spPr>
+        <p:txBody>
+          <a:bodyPr wrap="square">
+            <a:noAutofit/>
+          </a:bodyPr>
+          <a:lstStyle/>
+          <a:p>
+            <a:pPr algn="r">
+              <a:lnSpc>
+                <a:spcPts val="2200"/>
+              </a:lnSpc>
+              <a:defRPr sz="1000" b="0">
+                <a:solidFill>
+                  <a:srgbClr val="666666"/>
+                </a:solidFill>
+                <a:latin typeface="Calibri"/>
+              </a:defRPr>
+            </a:pPr>
+            <a:r>
+              <a:t>learn_partitioning — 05 hypergraph partition</a:t>
+            </a:r>
+          </a:p>
+        </p:txBody>
+      </p:sp>
+    </p:spTree>
+  </p:cSld>
+  <p:clrMapOvr>
+    <a:masterClrMapping/>
+  </p:clrMapOvr>
+</p:sld>
+</file>
+
+<file path=ppt/slides/slide6.xml><?xml version="1.0" encoding="utf-8"?>
 <p:sld xmlns:a="http://schemas.openxmlformats.org/drawingml/2006/main" xmlns:p="http://schemas.openxmlformats.org/presentationml/2006/main" xmlns:r="http://schemas.openxmlformats.org/officeDocument/2006/relationships">
   <p:cSld>
     <p:spTree>
@@ -5052,7 +6319,7 @@
 </p:sld>
 </file>
 
-<file path=ppt/slides/slide4.xml><?xml version="1.0" encoding="utf-8"?>
+<file path=ppt/slides/slide7.xml><?xml version="1.0" encoding="utf-8"?>
 <p:sld xmlns:a="http://schemas.openxmlformats.org/drawingml/2006/main" xmlns:p="http://schemas.openxmlformats.org/presentationml/2006/main" xmlns:r="http://schemas.openxmlformats.org/officeDocument/2006/relationships">
   <p:cSld>
     <p:spTree>
@@ -5211,7 +6478,7 @@
 </p:sld>
 </file>
 
-<file path=ppt/slides/slide5.xml><?xml version="1.0" encoding="utf-8"?>
+<file path=ppt/slides/slide8.xml><?xml version="1.0" encoding="utf-8"?>
 <p:sld xmlns:a="http://schemas.openxmlformats.org/drawingml/2006/main" xmlns:p="http://schemas.openxmlformats.org/presentationml/2006/main" xmlns:r="http://schemas.openxmlformats.org/officeDocument/2006/relationships">
   <p:cSld>
     <p:spTree>
@@ -5370,7 +6637,7 @@
 </p:sld>
 </file>
 
-<file path=ppt/slides/slide6.xml><?xml version="1.0" encoding="utf-8"?>
+<file path=ppt/slides/slide9.xml><?xml version="1.0" encoding="utf-8"?>
 <p:sld xmlns:a="http://schemas.openxmlformats.org/drawingml/2006/main" xmlns:p="http://schemas.openxmlformats.org/presentationml/2006/main" xmlns:r="http://schemas.openxmlformats.org/officeDocument/2006/relationships">
   <p:cSld>
     <p:spTree>
@@ -5485,553 +6752,6 @@
       <p:sp>
         <p:nvSpPr>
           <p:cNvPr id="5" name="TextBox 4"/>
-          <p:cNvSpPr txBox="1"/>
-          <p:nvPr/>
-        </p:nvSpPr>
-        <p:spPr>
-          <a:xfrm>
-            <a:off x="548640" y="6355080"/>
-            <a:ext cx="11064240" cy="320040"/>
-          </a:xfrm>
-          <a:prstGeom prst="rect">
-            <a:avLst/>
-          </a:prstGeom>
-          <a:noFill/>
-        </p:spPr>
-        <p:txBody>
-          <a:bodyPr wrap="square">
-            <a:noAutofit/>
-          </a:bodyPr>
-          <a:lstStyle/>
-          <a:p>
-            <a:pPr algn="r">
-              <a:lnSpc>
-                <a:spcPts val="2200"/>
-              </a:lnSpc>
-              <a:defRPr sz="1000" b="0">
-                <a:solidFill>
-                  <a:srgbClr val="666666"/>
-                </a:solidFill>
-                <a:latin typeface="Calibri"/>
-              </a:defRPr>
-            </a:pPr>
-            <a:r>
-              <a:t>learn_partitioning — 05 hypergraph partition</a:t>
-            </a:r>
-          </a:p>
-        </p:txBody>
-      </p:sp>
-    </p:spTree>
-  </p:cSld>
-  <p:clrMapOvr>
-    <a:masterClrMapping/>
-  </p:clrMapOvr>
-</p:sld>
-</file>
-
-<file path=ppt/slides/slide7.xml><?xml version="1.0" encoding="utf-8"?>
-<p:sld xmlns:a="http://schemas.openxmlformats.org/drawingml/2006/main" xmlns:p="http://schemas.openxmlformats.org/presentationml/2006/main" xmlns:r="http://schemas.openxmlformats.org/officeDocument/2006/relationships">
-  <p:cSld>
-    <p:spTree>
-      <p:nvGrpSpPr>
-        <p:cNvPr id="1" name=""/>
-        <p:cNvGrpSpPr/>
-        <p:nvPr/>
-      </p:nvGrpSpPr>
-      <p:grpSpPr/>
-      <p:sp>
-        <p:nvSpPr>
-          <p:cNvPr id="2" name="TextBox 1"/>
-          <p:cNvSpPr txBox="1"/>
-          <p:nvPr/>
-        </p:nvSpPr>
-        <p:spPr>
-          <a:xfrm>
-            <a:off x="548640" y="411480"/>
-            <a:ext cx="11064240" cy="777240"/>
-          </a:xfrm>
-          <a:prstGeom prst="rect">
-            <a:avLst/>
-          </a:prstGeom>
-          <a:noFill/>
-        </p:spPr>
-        <p:txBody>
-          <a:bodyPr wrap="square">
-            <a:noAutofit/>
-          </a:bodyPr>
-          <a:lstStyle/>
-          <a:p>
-            <a:pPr>
-              <a:lnSpc>
-                <a:spcPts val="2200"/>
-              </a:lnSpc>
-            </a:pPr>
-            <a:r>
-              <a:rPr sz="2800" b="1">
-                <a:solidFill>
-                  <a:srgbClr val="1A1A2E"/>
-                </a:solidFill>
-                <a:latin typeface="Calibri"/>
-              </a:rPr>
-              <a:t>Why hypergraphs in partition</a:t>
-            </a:r>
-          </a:p>
-        </p:txBody>
-      </p:sp>
-      <p:pic>
-        <p:nvPicPr>
-          <p:cNvPr id="3" name="Picture 2" descr="05-takeaway.png"/>
-          <p:cNvPicPr>
-            <a:picLocks noChangeAspect="1"/>
-          </p:cNvPicPr>
-          <p:nvPr/>
-        </p:nvPicPr>
-        <p:blipFill>
-          <a:blip r:embed="rId2"/>
-          <a:stretch>
-            <a:fillRect/>
-          </a:stretch>
-        </p:blipFill>
-        <p:spPr>
-          <a:xfrm>
-            <a:off x="548640" y="1143000"/>
-            <a:ext cx="9404113" cy="4572000"/>
-          </a:xfrm>
-          <a:prstGeom prst="rect">
-            <a:avLst/>
-          </a:prstGeom>
-        </p:spPr>
-      </p:pic>
-      <p:sp>
-        <p:nvSpPr>
-          <p:cNvPr id="4" name="TextBox 3"/>
-          <p:cNvSpPr txBox="1"/>
-          <p:nvPr/>
-        </p:nvSpPr>
-        <p:spPr>
-          <a:xfrm>
-            <a:off x="548640" y="5897880"/>
-            <a:ext cx="11064240" cy="411480"/>
-          </a:xfrm>
-          <a:prstGeom prst="rect">
-            <a:avLst/>
-          </a:prstGeom>
-          <a:noFill/>
-        </p:spPr>
-        <p:txBody>
-          <a:bodyPr wrap="square">
-            <a:noAutofit/>
-          </a:bodyPr>
-          <a:lstStyle/>
-          <a:p>
-            <a:pPr>
-              <a:lnSpc>
-                <a:spcPts val="2200"/>
-              </a:lnSpc>
-            </a:pPr>
-            <a:r>
-              <a:rPr sz="1200" b="0">
-                <a:solidFill>
-                  <a:srgbClr val="333333"/>
-                </a:solidFill>
-                <a:latin typeface="Calibri"/>
-              </a:rPr>
-              <a:t>Why hypergraphs in partition</a:t>
-            </a:r>
-          </a:p>
-        </p:txBody>
-      </p:sp>
-      <p:sp>
-        <p:nvSpPr>
-          <p:cNvPr id="5" name="TextBox 4"/>
-          <p:cNvSpPr txBox="1"/>
-          <p:nvPr/>
-        </p:nvSpPr>
-        <p:spPr>
-          <a:xfrm>
-            <a:off x="548640" y="6355080"/>
-            <a:ext cx="11064240" cy="320040"/>
-          </a:xfrm>
-          <a:prstGeom prst="rect">
-            <a:avLst/>
-          </a:prstGeom>
-          <a:noFill/>
-        </p:spPr>
-        <p:txBody>
-          <a:bodyPr wrap="square">
-            <a:noAutofit/>
-          </a:bodyPr>
-          <a:lstStyle/>
-          <a:p>
-            <a:pPr algn="r">
-              <a:lnSpc>
-                <a:spcPts val="2200"/>
-              </a:lnSpc>
-              <a:defRPr sz="1000" b="0">
-                <a:solidFill>
-                  <a:srgbClr val="666666"/>
-                </a:solidFill>
-                <a:latin typeface="Calibri"/>
-              </a:defRPr>
-            </a:pPr>
-            <a:r>
-              <a:t>learn_partitioning — 05 hypergraph partition</a:t>
-            </a:r>
-          </a:p>
-        </p:txBody>
-      </p:sp>
-    </p:spTree>
-  </p:cSld>
-  <p:clrMapOvr>
-    <a:masterClrMapping/>
-  </p:clrMapOvr>
-</p:sld>
-</file>
-
-<file path=ppt/slides/slide8.xml><?xml version="1.0" encoding="utf-8"?>
-<p:sld xmlns:a="http://schemas.openxmlformats.org/drawingml/2006/main" xmlns:p="http://schemas.openxmlformats.org/presentationml/2006/main" xmlns:r="http://schemas.openxmlformats.org/officeDocument/2006/relationships">
-  <p:cSld>
-    <p:spTree>
-      <p:nvGrpSpPr>
-        <p:cNvPr id="1" name=""/>
-        <p:cNvGrpSpPr/>
-        <p:nvPr/>
-      </p:nvGrpSpPr>
-      <p:grpSpPr/>
-      <p:sp>
-        <p:nvSpPr>
-          <p:cNvPr id="2" name="TextBox 1"/>
-          <p:cNvSpPr txBox="1"/>
-          <p:nvPr/>
-        </p:nvSpPr>
-        <p:spPr>
-          <a:xfrm>
-            <a:off x="548640" y="411480"/>
-            <a:ext cx="11064240" cy="777240"/>
-          </a:xfrm>
-          <a:prstGeom prst="rect">
-            <a:avLst/>
-          </a:prstGeom>
-          <a:noFill/>
-        </p:spPr>
-        <p:txBody>
-          <a:bodyPr wrap="square">
-            <a:noAutofit/>
-          </a:bodyPr>
-          <a:lstStyle/>
-          <a:p>
-            <a:pPr>
-              <a:lnSpc>
-                <a:spcPts val="2200"/>
-              </a:lnSpc>
-            </a:pPr>
-            <a:r>
-              <a:rPr sz="2800" b="1">
-                <a:solidFill>
-                  <a:srgbClr val="1A1A2E"/>
-                </a:solidFill>
-                <a:latin typeface="Calibri"/>
-              </a:rPr>
-              <a:t>Browser lab track</a:t>
-            </a:r>
-          </a:p>
-        </p:txBody>
-      </p:sp>
-      <p:sp>
-        <p:nvSpPr>
-          <p:cNvPr id="3" name="TextBox 2"/>
-          <p:cNvSpPr txBox="1"/>
-          <p:nvPr/>
-        </p:nvSpPr>
-        <p:spPr>
-          <a:xfrm>
-            <a:off x="548640" y="1234440"/>
-            <a:ext cx="11064240" cy="4937760"/>
-          </a:xfrm>
-          <a:prstGeom prst="rect">
-            <a:avLst/>
-          </a:prstGeom>
-          <a:noFill/>
-        </p:spPr>
-        <p:txBody>
-          <a:bodyPr wrap="square">
-            <a:noAutofit/>
-          </a:bodyPr>
-          <a:lstStyle/>
-          <a:p>
-            <a:pPr lvl="0" marL="457200" indent="-228600">
-              <a:buFont typeface="Calibri"/>
-              <a:spcAft>
-                <a:spcPts val="1000"/>
-              </a:spcAft>
-              <a:buSzPct val="100000"/>
-              <a:buChar char="•"/>
-              <a:lnSpc>
-                <a:spcPts val="2200"/>
-              </a:lnSpc>
-            </a:pPr>
-            <a:r>
-              <a:rPr sz="2000" b="0">
-                <a:solidFill>
-                  <a:srgbClr val="333333"/>
-                </a:solidFill>
-                <a:latin typeface="Calibri"/>
-              </a:rPr>
-              <a:t>In the browser lab track, open the </a:t>
-            </a:r>
-            <a:r>
-              <a:rPr sz="2000" b="1">
-                <a:solidFill>
-                  <a:srgbClr val="333333"/>
-                </a:solidFill>
-                <a:latin typeface="Calibri"/>
-              </a:rPr>
-              <a:t>hypergraph-partition</a:t>
-            </a:r>
-            <a:r>
-              <a:rPr sz="2000" b="0">
-                <a:solidFill>
-                  <a:srgbClr val="333333"/>
-                </a:solidFill>
-                <a:latin typeface="Calibri"/>
-              </a:rPr>
-              <a:t> lab from the tools shelf</a:t>
-            </a:r>
-          </a:p>
-          <a:p>
-            <a:pPr lvl="0" marL="457200" indent="-228600">
-              <a:buFont typeface="Calibri"/>
-              <a:spcAft>
-                <a:spcPts val="1000"/>
-              </a:spcAft>
-              <a:buSzPct val="100000"/>
-              <a:buChar char="•"/>
-              <a:lnSpc>
-                <a:spcPts val="2200"/>
-              </a:lnSpc>
-            </a:pPr>
-            <a:r>
-              <a:rPr sz="2000" b="0">
-                <a:solidFill>
-                  <a:srgbClr val="333333"/>
-                </a:solidFill>
-                <a:latin typeface="Calibri"/>
-              </a:rPr>
-              <a:t>Load the starter graph, run the algorithm once</a:t>
-            </a:r>
-          </a:p>
-          <a:p>
-            <a:pPr lvl="0" marL="457200" indent="-228600">
-              <a:buFont typeface="Calibri"/>
-              <a:spcAft>
-                <a:spcPts val="1000"/>
-              </a:spcAft>
-              <a:buSzPct val="100000"/>
-              <a:buChar char="•"/>
-              <a:lnSpc>
-                <a:spcPts val="2200"/>
-              </a:lnSpc>
-            </a:pPr>
-            <a:r>
-              <a:rPr sz="2000" b="0">
-                <a:solidFill>
-                  <a:srgbClr val="333333"/>
-                </a:solidFill>
-                <a:latin typeface="Calibri"/>
-              </a:rPr>
-              <a:t>Work the challenges that lock the goldens</a:t>
-            </a:r>
-          </a:p>
-        </p:txBody>
-      </p:sp>
-      <p:sp>
-        <p:nvSpPr>
-          <p:cNvPr id="4" name="TextBox 3"/>
-          <p:cNvSpPr txBox="1"/>
-          <p:nvPr/>
-        </p:nvSpPr>
-        <p:spPr>
-          <a:xfrm>
-            <a:off x="548640" y="6355080"/>
-            <a:ext cx="11064240" cy="320040"/>
-          </a:xfrm>
-          <a:prstGeom prst="rect">
-            <a:avLst/>
-          </a:prstGeom>
-          <a:noFill/>
-        </p:spPr>
-        <p:txBody>
-          <a:bodyPr wrap="square">
-            <a:noAutofit/>
-          </a:bodyPr>
-          <a:lstStyle/>
-          <a:p>
-            <a:pPr algn="r">
-              <a:lnSpc>
-                <a:spcPts val="2200"/>
-              </a:lnSpc>
-              <a:defRPr sz="1000" b="0">
-                <a:solidFill>
-                  <a:srgbClr val="666666"/>
-                </a:solidFill>
-                <a:latin typeface="Calibri"/>
-              </a:defRPr>
-            </a:pPr>
-            <a:r>
-              <a:t>learn_partitioning — 05 hypergraph partition</a:t>
-            </a:r>
-          </a:p>
-        </p:txBody>
-      </p:sp>
-    </p:spTree>
-  </p:cSld>
-  <p:clrMapOvr>
-    <a:masterClrMapping/>
-  </p:clrMapOvr>
-</p:sld>
-</file>
-
-<file path=ppt/slides/slide9.xml><?xml version="1.0" encoding="utf-8"?>
-<p:sld xmlns:a="http://schemas.openxmlformats.org/drawingml/2006/main" xmlns:p="http://schemas.openxmlformats.org/presentationml/2006/main" xmlns:r="http://schemas.openxmlformats.org/officeDocument/2006/relationships">
-  <p:cSld>
-    <p:spTree>
-      <p:nvGrpSpPr>
-        <p:cNvPr id="1" name=""/>
-        <p:cNvGrpSpPr/>
-        <p:nvPr/>
-      </p:nvGrpSpPr>
-      <p:grpSpPr/>
-      <p:sp>
-        <p:nvSpPr>
-          <p:cNvPr id="2" name="TextBox 1"/>
-          <p:cNvSpPr txBox="1"/>
-          <p:nvPr/>
-        </p:nvSpPr>
-        <p:spPr>
-          <a:xfrm>
-            <a:off x="548640" y="411480"/>
-            <a:ext cx="11064240" cy="777240"/>
-          </a:xfrm>
-          <a:prstGeom prst="rect">
-            <a:avLst/>
-          </a:prstGeom>
-          <a:noFill/>
-        </p:spPr>
-        <p:txBody>
-          <a:bodyPr wrap="square">
-            <a:noAutofit/>
-          </a:bodyPr>
-          <a:lstStyle/>
-          <a:p>
-            <a:pPr>
-              <a:lnSpc>
-                <a:spcPts val="2200"/>
-              </a:lnSpc>
-            </a:pPr>
-            <a:r>
-              <a:rPr sz="2800" b="1">
-                <a:solidFill>
-                  <a:srgbClr val="1A1A2E"/>
-                </a:solidFill>
-                <a:latin typeface="Calibri"/>
-              </a:rPr>
-              <a:t>Implement track</a:t>
-            </a:r>
-          </a:p>
-        </p:txBody>
-      </p:sp>
-      <p:sp>
-        <p:nvSpPr>
-          <p:cNvPr id="3" name="TextBox 2"/>
-          <p:cNvSpPr txBox="1"/>
-          <p:nvPr/>
-        </p:nvSpPr>
-        <p:spPr>
-          <a:xfrm>
-            <a:off x="548640" y="1234440"/>
-            <a:ext cx="11064240" cy="4937760"/>
-          </a:xfrm>
-          <a:prstGeom prst="rect">
-            <a:avLst/>
-          </a:prstGeom>
-          <a:noFill/>
-        </p:spPr>
-        <p:txBody>
-          <a:bodyPr wrap="square">
-            <a:noAutofit/>
-          </a:bodyPr>
-          <a:lstStyle/>
-          <a:p>
-            <a:pPr lvl="0" marL="457200" indent="-228600">
-              <a:buFont typeface="Calibri"/>
-              <a:spcAft>
-                <a:spcPts val="1000"/>
-              </a:spcAft>
-              <a:buSzPct val="100000"/>
-              <a:buChar char="•"/>
-              <a:lnSpc>
-                <a:spcPts val="2200"/>
-              </a:lnSpc>
-            </a:pPr>
-            <a:r>
-              <a:rPr sz="2000" b="0">
-                <a:solidFill>
-                  <a:srgbClr val="333333"/>
-                </a:solidFill>
-                <a:latin typeface="Calibri"/>
-              </a:rPr>
-              <a:t>In the implement track, open this module’s examples and the course `common/` solvers</a:t>
-            </a:r>
-          </a:p>
-          <a:p>
-            <a:pPr lvl="0" marL="457200" indent="-228600">
-              <a:buFont typeface="Calibri"/>
-              <a:spcAft>
-                <a:spcPts val="1000"/>
-              </a:spcAft>
-              <a:buSzPct val="100000"/>
-              <a:buChar char="•"/>
-              <a:lnSpc>
-                <a:spcPts val="2200"/>
-              </a:lnSpc>
-            </a:pPr>
-            <a:r>
-              <a:rPr sz="2000" b="0">
-                <a:solidFill>
-                  <a:srgbClr val="333333"/>
-                </a:solidFill>
-                <a:latin typeface="Calibri"/>
-              </a:rPr>
-              <a:t>Parse the tiny graph, run the algorithm with a deterministic seed</a:t>
-            </a:r>
-          </a:p>
-          <a:p>
-            <a:pPr lvl="0" marL="457200" indent="-228600">
-              <a:buFont typeface="Calibri"/>
-              <a:spcAft>
-                <a:spcPts val="1000"/>
-              </a:spcAft>
-              <a:buSzPct val="100000"/>
-              <a:buChar char="•"/>
-              <a:lnSpc>
-                <a:spcPts val="2200"/>
-              </a:lnSpc>
-            </a:pPr>
-            <a:r>
-              <a:rPr sz="2000" b="0">
-                <a:solidFill>
-                  <a:srgbClr val="333333"/>
-                </a:solidFill>
-                <a:latin typeface="Calibri"/>
-              </a:rPr>
-              <a:t>Match the browser goldens before you claim the checklist</a:t>
-            </a:r>
-          </a:p>
-        </p:txBody>
-      </p:sp>
-      <p:sp>
-        <p:nvSpPr>
-          <p:cNvPr id="4" name="TextBox 3"/>
           <p:cNvSpPr txBox="1"/>
           <p:nvPr/>
         </p:nvSpPr>
